--- a/Autonomous_Data_Warehouse_agents.pptx
+++ b/Autonomous_Data_Warehouse_agents.pptx
@@ -13,7 +13,8 @@
     <p:sldId id="266" r:id="rId7"/>
     <p:sldId id="267" r:id="rId8"/>
     <p:sldId id="262" r:id="rId9"/>
-    <p:sldId id="268" r:id="rId10"/>
+    <p:sldId id="269" r:id="rId10"/>
+    <p:sldId id="268" r:id="rId11"/>
   </p:sldIdLst>
   <p:sldSz cx="12192000" cy="6858000"/>
   <p:notesSz cx="6858000" cy="9144000"/>
@@ -112,6 +113,11 @@
       </a:defRPr>
     </a:lvl9pPr>
   </p:defaultTextStyle>
+  <p:extLst>
+    <p:ext uri="{EFAFB233-063F-42B5-8137-9DF3F51BA10A}">
+      <p15:sldGuideLst xmlns:p15="http://schemas.microsoft.com/office/powerpoint/2012/main"/>
+    </p:ext>
+  </p:extLst>
 </p:presentation>
 </file>
 
@@ -298,7 +304,7 @@
           <a:p>
             <a:fld id="{4AAD347D-5ACD-4C99-B74B-A9C85AD731AF}" type="datetimeFigureOut">
               <a:rPr lang="en-US" dirty="0"/>
-              <a:t>10/22/2026</a:t>
+              <a:t>10/23/2026</a:t>
             </a:fld>
             <a:endParaRPr lang="en-US" dirty="0"/>
           </a:p>
@@ -568,7 +574,7 @@
           <a:p>
             <a:fld id="{4509A250-FF31-4206-8172-F9D3106AACB1}" type="datetimeFigureOut">
               <a:rPr lang="en-US" dirty="0"/>
-              <a:t>10/22/2026</a:t>
+              <a:t>10/23/2026</a:t>
             </a:fld>
             <a:endParaRPr lang="en-US" dirty="0"/>
           </a:p>
@@ -757,7 +763,7 @@
           <a:p>
             <a:fld id="{4509A250-FF31-4206-8172-F9D3106AACB1}" type="datetimeFigureOut">
               <a:rPr lang="en-US" dirty="0"/>
-              <a:t>10/22/2026</a:t>
+              <a:t>10/23/2026</a:t>
             </a:fld>
             <a:endParaRPr lang="en-US" dirty="0"/>
           </a:p>
@@ -1020,7 +1026,7 @@
           <a:p>
             <a:fld id="{4509A250-FF31-4206-8172-F9D3106AACB1}" type="datetimeFigureOut">
               <a:rPr lang="en-US" dirty="0"/>
-              <a:t>10/22/2026</a:t>
+              <a:t>10/23/2026</a:t>
             </a:fld>
             <a:endParaRPr lang="en-US" dirty="0"/>
           </a:p>
@@ -1347,7 +1353,7 @@
           <a:p>
             <a:fld id="{4509A250-FF31-4206-8172-F9D3106AACB1}" type="datetimeFigureOut">
               <a:rPr lang="en-US" dirty="0"/>
-              <a:t>10/22/2026</a:t>
+              <a:t>10/23/2026</a:t>
             </a:fld>
             <a:endParaRPr lang="en-US" dirty="0"/>
           </a:p>
@@ -1952,7 +1958,7 @@
           <a:p>
             <a:fld id="{4509A250-FF31-4206-8172-F9D3106AACB1}" type="datetimeFigureOut">
               <a:rPr lang="en-US" dirty="0"/>
-              <a:t>10/22/2026</a:t>
+              <a:t>10/23/2026</a:t>
             </a:fld>
             <a:endParaRPr lang="en-US" dirty="0"/>
           </a:p>
@@ -2794,7 +2800,7 @@
           <a:p>
             <a:fld id="{4509A250-FF31-4206-8172-F9D3106AACB1}" type="datetimeFigureOut">
               <a:rPr lang="en-US" dirty="0"/>
-              <a:t>10/22/2026</a:t>
+              <a:t>10/23/2026</a:t>
             </a:fld>
             <a:endParaRPr lang="en-US" dirty="0"/>
           </a:p>
@@ -2959,7 +2965,7 @@
           <a:p>
             <a:fld id="{4509A250-FF31-4206-8172-F9D3106AACB1}" type="datetimeFigureOut">
               <a:rPr lang="en-US" dirty="0"/>
-              <a:t>10/22/2026</a:t>
+              <a:t>10/23/2026</a:t>
             </a:fld>
             <a:endParaRPr lang="en-US" dirty="0"/>
           </a:p>
@@ -3134,7 +3140,7 @@
           <a:p>
             <a:fld id="{4509A250-FF31-4206-8172-F9D3106AACB1}" type="datetimeFigureOut">
               <a:rPr lang="en-US" dirty="0"/>
-              <a:t>10/22/2026</a:t>
+              <a:t>10/23/2026</a:t>
             </a:fld>
             <a:endParaRPr lang="en-US" dirty="0"/>
           </a:p>
@@ -3299,7 +3305,7 @@
           <a:p>
             <a:fld id="{4509A250-FF31-4206-8172-F9D3106AACB1}" type="datetimeFigureOut">
               <a:rPr lang="en-US" dirty="0"/>
-              <a:t>10/22/2026</a:t>
+              <a:t>10/23/2026</a:t>
             </a:fld>
             <a:endParaRPr lang="en-US" dirty="0"/>
           </a:p>
@@ -3538,7 +3544,7 @@
           <a:p>
             <a:fld id="{4509A250-FF31-4206-8172-F9D3106AACB1}" type="datetimeFigureOut">
               <a:rPr lang="en-US" dirty="0"/>
-              <a:t>10/22/2026</a:t>
+              <a:t>10/23/2026</a:t>
             </a:fld>
             <a:endParaRPr lang="en-US" dirty="0"/>
           </a:p>
@@ -3825,7 +3831,7 @@
           <a:p>
             <a:fld id="{4509A250-FF31-4206-8172-F9D3106AACB1}" type="datetimeFigureOut">
               <a:rPr lang="en-US" dirty="0"/>
-              <a:t>10/22/2026</a:t>
+              <a:t>10/23/2026</a:t>
             </a:fld>
             <a:endParaRPr lang="en-US" dirty="0"/>
           </a:p>
@@ -4258,7 +4264,7 @@
           <a:p>
             <a:fld id="{4509A250-FF31-4206-8172-F9D3106AACB1}" type="datetimeFigureOut">
               <a:rPr lang="en-US" dirty="0"/>
-              <a:t>10/22/2026</a:t>
+              <a:t>10/23/2026</a:t>
             </a:fld>
             <a:endParaRPr lang="en-US" dirty="0"/>
           </a:p>
@@ -4371,7 +4377,7 @@
           <a:p>
             <a:fld id="{4509A250-FF31-4206-8172-F9D3106AACB1}" type="datetimeFigureOut">
               <a:rPr lang="en-US" dirty="0"/>
-              <a:t>10/22/2026</a:t>
+              <a:t>10/23/2026</a:t>
             </a:fld>
             <a:endParaRPr lang="en-US" dirty="0"/>
           </a:p>
@@ -4461,7 +4467,7 @@
           <a:p>
             <a:fld id="{4509A250-FF31-4206-8172-F9D3106AACB1}" type="datetimeFigureOut">
               <a:rPr lang="en-US" dirty="0"/>
-              <a:t>10/22/2026</a:t>
+              <a:t>10/23/2026</a:t>
             </a:fld>
             <a:endParaRPr lang="en-US" dirty="0"/>
           </a:p>
@@ -4735,7 +4741,7 @@
           <a:p>
             <a:fld id="{4509A250-FF31-4206-8172-F9D3106AACB1}" type="datetimeFigureOut">
               <a:rPr lang="en-US" dirty="0"/>
-              <a:t>10/22/2026</a:t>
+              <a:t>10/23/2026</a:t>
             </a:fld>
             <a:endParaRPr lang="en-US" dirty="0"/>
           </a:p>
@@ -5005,7 +5011,7 @@
           <a:p>
             <a:fld id="{4509A250-FF31-4206-8172-F9D3106AACB1}" type="datetimeFigureOut">
               <a:rPr lang="en-US" dirty="0"/>
-              <a:t>10/22/2026</a:t>
+              <a:t>10/23/2026</a:t>
             </a:fld>
             <a:endParaRPr lang="en-US" dirty="0"/>
           </a:p>
@@ -5429,7 +5435,7 @@
           <a:p>
             <a:fld id="{4509A250-FF31-4206-8172-F9D3106AACB1}" type="datetimeFigureOut">
               <a:rPr lang="en-US" dirty="0"/>
-              <a:t>10/22/2026</a:t>
+              <a:t>10/23/2026</a:t>
             </a:fld>
             <a:endParaRPr lang="en-US" dirty="0"/>
           </a:p>
@@ -5959,6 +5965,72 @@
   <p:clrMapOvr>
     <a:masterClrMapping/>
   </p:clrMapOvr>
+  <p:timing>
+    <p:tnLst>
+      <p:par>
+        <p:cTn id="1" dur="indefinite" restart="never" nodeType="tmRoot"/>
+      </p:par>
+    </p:tnLst>
+  </p:timing>
+</p:sld>
+</file>
+
+<file path=ppt/slides/slide10.xml><?xml version="1.0" encoding="utf-8"?>
+<p:sld xmlns:a="http://schemas.openxmlformats.org/drawingml/2006/main" xmlns:r="http://schemas.openxmlformats.org/officeDocument/2006/relationships" xmlns:p="http://schemas.openxmlformats.org/presentationml/2006/main">
+  <p:cSld>
+    <p:spTree>
+      <p:nvGrpSpPr>
+        <p:cNvPr id="1" name=""/>
+        <p:cNvGrpSpPr/>
+        <p:nvPr/>
+      </p:nvGrpSpPr>
+      <p:grpSpPr>
+        <a:xfrm>
+          <a:off x="0" y="0"/>
+          <a:ext cx="0" cy="0"/>
+          <a:chOff x="0" y="0"/>
+          <a:chExt cx="0" cy="0"/>
+        </a:xfrm>
+      </p:grpSpPr>
+      <p:sp>
+        <p:nvSpPr>
+          <p:cNvPr id="2" name="Title 1"/>
+          <p:cNvSpPr>
+            <a:spLocks noGrp="1"/>
+          </p:cNvSpPr>
+          <p:nvPr>
+            <p:ph type="ctrTitle"/>
+          </p:nvPr>
+        </p:nvSpPr>
+        <p:spPr>
+          <a:xfrm>
+            <a:off x="1194712" y="2388705"/>
+            <a:ext cx="8825658" cy="1467678"/>
+          </a:xfrm>
+        </p:spPr>
+        <p:txBody>
+          <a:bodyPr/>
+          <a:lstStyle/>
+          <a:p>
+            <a:pPr algn="ctr"/>
+            <a:r>
+              <a:rPr lang="en-US" dirty="0" smtClean="0"/>
+              <a:t>Thank You</a:t>
+            </a:r>
+            <a:endParaRPr lang="en-IN" dirty="0"/>
+          </a:p>
+        </p:txBody>
+      </p:sp>
+    </p:spTree>
+    <p:extLst>
+      <p:ext uri="{BB962C8B-B14F-4D97-AF65-F5344CB8AC3E}">
+        <p14:creationId xmlns:p14="http://schemas.microsoft.com/office/powerpoint/2010/main" val="560455718"/>
+      </p:ext>
+    </p:extLst>
+  </p:cSld>
+  <p:clrMapOvr>
+    <a:masterClrMapping/>
+  </p:clrMapOvr>
 </p:sld>
 </file>
 
@@ -6055,7 +6127,18 @@
             </a:br>
             <a:r>
               <a:rPr lang="en-US" sz="1800" dirty="0"/>
-              <a:t>Schema drift: Changes between registered and incoming schemas require identification, assessment, and governance approval.</a:t>
+              <a:t>Schema drift: Changes between registered and incoming schemas require identification, assessment, and governance approval</a:t>
+            </a:r>
+            <a:r>
+              <a:rPr lang="en-US" sz="1800" dirty="0" smtClean="0"/>
+              <a:t>.</a:t>
+            </a:r>
+            <a:br>
+              <a:rPr lang="en-US" sz="1800" dirty="0" smtClean="0"/>
+            </a:br>
+            <a:r>
+              <a:rPr lang="en-US" sz="1800" dirty="0"/>
+              <a:t/>
             </a:r>
             <a:br>
               <a:rPr lang="en-US" sz="1800" dirty="0"/>
@@ -6183,6 +6266,13 @@
   <p:clrMapOvr>
     <a:masterClrMapping/>
   </p:clrMapOvr>
+  <p:timing>
+    <p:tnLst>
+      <p:par>
+        <p:cTn id="1" dur="indefinite" restart="never" nodeType="tmRoot"/>
+      </p:par>
+    </p:tnLst>
+  </p:timing>
 </p:sld>
 </file>
 
@@ -6770,8 +6860,8 @@
         </p:nvSpPr>
         <p:spPr>
           <a:xfrm>
-            <a:off x="1307355" y="1272209"/>
-            <a:ext cx="8825658" cy="4678017"/>
+            <a:off x="1108572" y="1272209"/>
+            <a:ext cx="8825658" cy="3631096"/>
           </a:xfrm>
         </p:spPr>
         <p:txBody>
@@ -6821,7 +6911,18 @@
             </a:r>
             <a:r>
               <a:rPr lang="en-US" sz="1800" dirty="0"/>
-              <a:t> interface displays the execution plan, agent handoffs, MCP tool calls, and execution times.</a:t>
+              <a:t> interface displays the execution plan, agent handoffs, MCP tool calls, and execution times</a:t>
+            </a:r>
+            <a:r>
+              <a:rPr lang="en-US" sz="1800" dirty="0" smtClean="0"/>
+              <a:t>.</a:t>
+            </a:r>
+            <a:br>
+              <a:rPr lang="en-US" sz="1800" dirty="0" smtClean="0"/>
+            </a:br>
+            <a:r>
+              <a:rPr lang="en-US" sz="1800" dirty="0"/>
+              <a:t/>
             </a:r>
             <a:br>
               <a:rPr lang="en-US" sz="1800" dirty="0"/>
@@ -7380,7 +7481,7 @@
         <p:spPr>
           <a:xfrm>
             <a:off x="1073426" y="1310814"/>
-            <a:ext cx="8865703" cy="1292662"/>
+            <a:ext cx="8865703" cy="2954655"/>
           </a:xfrm>
           <a:prstGeom prst="rect">
             <a:avLst/>
@@ -7405,14 +7506,70 @@
             <a:endParaRPr lang="en-US" dirty="0"/>
           </a:p>
           <a:p>
+            <a:pPr marL="285750" indent="-285750">
+              <a:buFont typeface="Arial" panose="020B0604020202020204" pitchFamily="34" charset="0"/>
+              <a:buChar char="•"/>
+            </a:pPr>
             <a:r>
               <a:rPr lang="en-US" dirty="0" smtClean="0"/>
               <a:t>Add </a:t>
             </a:r>
             <a:r>
               <a:rPr lang="en-US" dirty="0"/>
-              <a:t>persistent, user-scoped memory for preferences and previous decisions, with appropriate access controls.</a:t>
-            </a:r>
+              <a:t>persistent, user-scoped memory for preferences and previous decisions, with appropriate access controls</a:t>
+            </a:r>
+            <a:r>
+              <a:rPr lang="en-US" dirty="0" smtClean="0"/>
+              <a:t>.</a:t>
+            </a:r>
+          </a:p>
+          <a:p>
+            <a:pPr marL="285750" indent="-285750">
+              <a:buFont typeface="Arial" panose="020B0604020202020204" pitchFamily="34" charset="0"/>
+              <a:buChar char="•"/>
+            </a:pPr>
+            <a:endParaRPr lang="en-US" dirty="0"/>
+          </a:p>
+          <a:p>
+            <a:pPr marL="285750" indent="-285750">
+              <a:buFont typeface="Arial" panose="020B0604020202020204" pitchFamily="34" charset="0"/>
+              <a:buChar char="•"/>
+            </a:pPr>
+            <a:r>
+              <a:rPr lang="en-US" dirty="0" smtClean="0"/>
+              <a:t>Integrate the agents with Enterprise data catalog tool like </a:t>
+            </a:r>
+            <a:r>
+              <a:rPr lang="en-US" dirty="0" err="1" smtClean="0"/>
+              <a:t>Dataplex</a:t>
+            </a:r>
+            <a:r>
+              <a:rPr lang="en-US" dirty="0" smtClean="0"/>
+              <a:t> universal catalog on Google Cloud Platform. </a:t>
+            </a:r>
+          </a:p>
+          <a:p>
+            <a:pPr marL="285750" indent="-285750">
+              <a:buFont typeface="Arial" panose="020B0604020202020204" pitchFamily="34" charset="0"/>
+              <a:buChar char="•"/>
+            </a:pPr>
+            <a:endParaRPr lang="en-US" dirty="0"/>
+          </a:p>
+          <a:p>
+            <a:pPr marL="285750" indent="-285750">
+              <a:buFont typeface="Arial" panose="020B0604020202020204" pitchFamily="34" charset="0"/>
+              <a:buChar char="•"/>
+            </a:pPr>
+            <a:r>
+              <a:rPr lang="en-US" dirty="0" smtClean="0"/>
+              <a:t>Integrate with IAM roles for Authorization</a:t>
+            </a:r>
+          </a:p>
+          <a:p>
+            <a:pPr marL="285750" indent="-285750">
+              <a:buFont typeface="Arial" panose="020B0604020202020204" pitchFamily="34" charset="0"/>
+              <a:buChar char="•"/>
+            </a:pPr>
             <a:endParaRPr lang="en-IN" dirty="0"/>
           </a:p>
         </p:txBody>
@@ -7477,7 +7634,7 @@
             <a:pPr algn="ctr"/>
             <a:r>
               <a:rPr lang="en-US" dirty="0" smtClean="0"/>
-              <a:t>Thank You</a:t>
+              <a:t>Q&amp;A</a:t>
             </a:r>
             <a:endParaRPr lang="en-IN" dirty="0"/>
           </a:p>
@@ -7486,7 +7643,7 @@
     </p:spTree>
     <p:extLst>
       <p:ext uri="{BB962C8B-B14F-4D97-AF65-F5344CB8AC3E}">
-        <p14:creationId xmlns:p14="http://schemas.microsoft.com/office/powerpoint/2010/main" val="560455718"/>
+        <p14:creationId xmlns:p14="http://schemas.microsoft.com/office/powerpoint/2010/main" val="2838422618"/>
       </p:ext>
     </p:extLst>
   </p:cSld>
